--- a/build/CLL798_prelim_5min.pptx
+++ b/build/CLL798_prelim_5min.pptx
@@ -4417,46 +4417,7 @@
       </p:sp>
       <p:sp>
         <p:nvSpPr>
-          <p:cNvPr id="3" name="TextBox 2"/>
-          <p:cNvSpPr txBox="1"/>
-          <p:nvPr/>
-        </p:nvSpPr>
-        <p:spPr>
-          <a:xfrm>
-            <a:off x="8973007" y="274320"/>
-            <a:ext cx="2743200" cy="274320"/>
-          </a:xfrm>
-          <a:prstGeom prst="rect">
-            <a:avLst/>
-          </a:prstGeom>
-          <a:noFill/>
-        </p:spPr>
-        <p:txBody>
-          <a:bodyPr wrap="square" anchor="t" lIns="0" rIns="0" tIns="0" bIns="0">
-            <a:spAutoFit/>
-          </a:bodyPr>
-          <a:lstStyle/>
-          <a:p>
-            <a:pPr algn="r">
-              <a:spcAft>
-                <a:spcPts val="0"/>
-              </a:spcAft>
-            </a:pPr>
-            <a:r>
-              <a:rPr sz="1150" b="0">
-                <a:solidFill>
-                  <a:srgbClr val="8098A1"/>
-                </a:solidFill>
-                <a:latin typeface="Consolas"/>
-              </a:rPr>
-              <a:t>0:45  |  running 1:00</a:t>
-            </a:r>
-          </a:p>
-        </p:txBody>
-      </p:sp>
-      <p:sp>
-        <p:nvSpPr>
-          <p:cNvPr id="4" name="Rectangle 3"/>
+          <p:cNvPr id="3" name="Rectangle 2"/>
           <p:cNvSpPr/>
           <p:nvPr/>
         </p:nvSpPr>
@@ -4500,7 +4461,7 @@
       </p:sp>
       <p:sp>
         <p:nvSpPr>
-          <p:cNvPr id="5" name="TextBox 4"/>
+          <p:cNvPr id="4" name="TextBox 3"/>
           <p:cNvSpPr txBox="1"/>
           <p:nvPr/>
         </p:nvSpPr>
@@ -4542,7 +4503,7 @@
       </p:sp>
       <p:pic>
         <p:nvPicPr>
-          <p:cNvPr id="6" name="Picture 5" descr="fig1_networks.png"/>
+          <p:cNvPr id="5" name="Picture 4" descr="fig1_networks.png"/>
           <p:cNvPicPr>
             <a:picLocks noChangeAspect="1"/>
           </p:cNvPicPr>
@@ -4566,7 +4527,7 @@
       </p:pic>
       <p:sp>
         <p:nvSpPr>
-          <p:cNvPr id="7" name="TextBox 6"/>
+          <p:cNvPr id="6" name="TextBox 5"/>
           <p:cNvSpPr txBox="1"/>
           <p:nvPr/>
         </p:nvSpPr>
@@ -4687,7 +4648,7 @@
       </p:sp>
       <p:sp>
         <p:nvSpPr>
-          <p:cNvPr id="8" name="Rectangle 7"/>
+          <p:cNvPr id="7" name="Rectangle 6"/>
           <p:cNvSpPr/>
           <p:nvPr/>
         </p:nvSpPr>
@@ -4733,7 +4694,7 @@
       </p:sp>
       <p:sp>
         <p:nvSpPr>
-          <p:cNvPr id="9" name="TextBox 8"/>
+          <p:cNvPr id="8" name="TextBox 7"/>
           <p:cNvSpPr txBox="1"/>
           <p:nvPr/>
         </p:nvSpPr>
@@ -4810,7 +4771,7 @@
       </p:sp>
       <p:sp>
         <p:nvSpPr>
-          <p:cNvPr id="10" name="Rectangle 9"/>
+          <p:cNvPr id="9" name="Rectangle 8"/>
           <p:cNvSpPr/>
           <p:nvPr/>
         </p:nvSpPr>
@@ -4856,7 +4817,7 @@
       </p:sp>
       <p:sp>
         <p:nvSpPr>
-          <p:cNvPr id="11" name="TextBox 10"/>
+          <p:cNvPr id="10" name="TextBox 9"/>
           <p:cNvSpPr txBox="1"/>
           <p:nvPr/>
         </p:nvSpPr>
@@ -4933,7 +4894,7 @@
       </p:sp>
       <p:sp>
         <p:nvSpPr>
-          <p:cNvPr id="12" name="Rectangle 11"/>
+          <p:cNvPr id="11" name="Rectangle 10"/>
           <p:cNvSpPr/>
           <p:nvPr/>
         </p:nvSpPr>
@@ -4979,7 +4940,7 @@
       </p:sp>
       <p:sp>
         <p:nvSpPr>
-          <p:cNvPr id="13" name="TextBox 12"/>
+          <p:cNvPr id="12" name="TextBox 11"/>
           <p:cNvSpPr txBox="1"/>
           <p:nvPr/>
         </p:nvSpPr>
@@ -5130,46 +5091,7 @@
       </p:sp>
       <p:sp>
         <p:nvSpPr>
-          <p:cNvPr id="3" name="TextBox 2"/>
-          <p:cNvSpPr txBox="1"/>
-          <p:nvPr/>
-        </p:nvSpPr>
-        <p:spPr>
-          <a:xfrm>
-            <a:off x="8973007" y="274320"/>
-            <a:ext cx="2743200" cy="274320"/>
-          </a:xfrm>
-          <a:prstGeom prst="rect">
-            <a:avLst/>
-          </a:prstGeom>
-          <a:noFill/>
-        </p:spPr>
-        <p:txBody>
-          <a:bodyPr wrap="square" anchor="t" lIns="0" rIns="0" tIns="0" bIns="0">
-            <a:spAutoFit/>
-          </a:bodyPr>
-          <a:lstStyle/>
-          <a:p>
-            <a:pPr algn="r">
-              <a:spcAft>
-                <a:spcPts val="0"/>
-              </a:spcAft>
-            </a:pPr>
-            <a:r>
-              <a:rPr sz="1150" b="0">
-                <a:solidFill>
-                  <a:srgbClr val="8098A1"/>
-                </a:solidFill>
-                <a:latin typeface="Consolas"/>
-              </a:rPr>
-              <a:t>0:55  |  running 1:55</a:t>
-            </a:r>
-          </a:p>
-        </p:txBody>
-      </p:sp>
-      <p:sp>
-        <p:nvSpPr>
-          <p:cNvPr id="4" name="Rectangle 3"/>
+          <p:cNvPr id="3" name="Rectangle 2"/>
           <p:cNvSpPr/>
           <p:nvPr/>
         </p:nvSpPr>
@@ -5213,7 +5135,7 @@
       </p:sp>
       <p:sp>
         <p:nvSpPr>
-          <p:cNvPr id="5" name="TextBox 4"/>
+          <p:cNvPr id="4" name="TextBox 3"/>
           <p:cNvSpPr txBox="1"/>
           <p:nvPr/>
         </p:nvSpPr>
@@ -5255,7 +5177,7 @@
       </p:sp>
       <p:pic>
         <p:nvPicPr>
-          <p:cNvPr id="6" name="Picture 5" descr="fig3_terrain_effect.png"/>
+          <p:cNvPr id="5" name="Picture 4" descr="fig3_terrain_effect.png"/>
           <p:cNvPicPr>
             <a:picLocks noChangeAspect="1"/>
           </p:cNvPicPr>
@@ -5279,7 +5201,7 @@
       </p:pic>
       <p:sp>
         <p:nvSpPr>
-          <p:cNvPr id="7" name="Rectangle 6"/>
+          <p:cNvPr id="6" name="Rectangle 5"/>
           <p:cNvSpPr/>
           <p:nvPr/>
         </p:nvSpPr>
@@ -5325,7 +5247,7 @@
       </p:sp>
       <p:sp>
         <p:nvSpPr>
-          <p:cNvPr id="8" name="TextBox 7"/>
+          <p:cNvPr id="7" name="TextBox 6"/>
           <p:cNvSpPr txBox="1"/>
           <p:nvPr/>
         </p:nvSpPr>
@@ -5402,7 +5324,7 @@
       </p:sp>
       <p:sp>
         <p:nvSpPr>
-          <p:cNvPr id="9" name="Rectangle 8"/>
+          <p:cNvPr id="8" name="Rectangle 7"/>
           <p:cNvSpPr/>
           <p:nvPr/>
         </p:nvSpPr>
@@ -5448,7 +5370,7 @@
       </p:sp>
       <p:sp>
         <p:nvSpPr>
-          <p:cNvPr id="10" name="TextBox 9"/>
+          <p:cNvPr id="9" name="TextBox 8"/>
           <p:cNvSpPr txBox="1"/>
           <p:nvPr/>
         </p:nvSpPr>
@@ -5525,7 +5447,7 @@
       </p:sp>
       <p:sp>
         <p:nvSpPr>
-          <p:cNvPr id="11" name="Rectangle 10"/>
+          <p:cNvPr id="10" name="Rectangle 9"/>
           <p:cNvSpPr/>
           <p:nvPr/>
         </p:nvSpPr>
@@ -5569,7 +5491,7 @@
       </p:sp>
       <p:sp>
         <p:nvSpPr>
-          <p:cNvPr id="12" name="TextBox 11"/>
+          <p:cNvPr id="11" name="TextBox 10"/>
           <p:cNvSpPr txBox="1"/>
           <p:nvPr/>
         </p:nvSpPr>
@@ -5701,46 +5623,7 @@
       </p:sp>
       <p:sp>
         <p:nvSpPr>
-          <p:cNvPr id="3" name="TextBox 2"/>
-          <p:cNvSpPr txBox="1"/>
-          <p:nvPr/>
-        </p:nvSpPr>
-        <p:spPr>
-          <a:xfrm>
-            <a:off x="8973007" y="274320"/>
-            <a:ext cx="2743200" cy="274320"/>
-          </a:xfrm>
-          <a:prstGeom prst="rect">
-            <a:avLst/>
-          </a:prstGeom>
-          <a:noFill/>
-        </p:spPr>
-        <p:txBody>
-          <a:bodyPr wrap="square" anchor="t" lIns="0" rIns="0" tIns="0" bIns="0">
-            <a:spAutoFit/>
-          </a:bodyPr>
-          <a:lstStyle/>
-          <a:p>
-            <a:pPr algn="r">
-              <a:spcAft>
-                <a:spcPts val="0"/>
-              </a:spcAft>
-            </a:pPr>
-            <a:r>
-              <a:rPr sz="1150" b="0">
-                <a:solidFill>
-                  <a:srgbClr val="8098A1"/>
-                </a:solidFill>
-                <a:latin typeface="Consolas"/>
-              </a:rPr>
-              <a:t>0:55  |  running 2:50</a:t>
-            </a:r>
-          </a:p>
-        </p:txBody>
-      </p:sp>
-      <p:sp>
-        <p:nvSpPr>
-          <p:cNvPr id="4" name="Rectangle 3"/>
+          <p:cNvPr id="3" name="Rectangle 2"/>
           <p:cNvSpPr/>
           <p:nvPr/>
         </p:nvSpPr>
@@ -5784,7 +5667,7 @@
       </p:sp>
       <p:sp>
         <p:nvSpPr>
-          <p:cNvPr id="5" name="TextBox 4"/>
+          <p:cNvPr id="4" name="TextBox 3"/>
           <p:cNvSpPr txBox="1"/>
           <p:nvPr/>
         </p:nvSpPr>
@@ -5826,7 +5709,7 @@
       </p:sp>
       <p:pic>
         <p:nvPicPr>
-          <p:cNvPr id="6" name="Picture 5" descr="fig8_pressure_zones.png"/>
+          <p:cNvPr id="5" name="Picture 4" descr="fig8_pressure_zones.png"/>
           <p:cNvPicPr>
             <a:picLocks noChangeAspect="1"/>
           </p:cNvPicPr>
@@ -5850,7 +5733,7 @@
       </p:pic>
       <p:sp>
         <p:nvSpPr>
-          <p:cNvPr id="7" name="TextBox 6"/>
+          <p:cNvPr id="6" name="TextBox 5"/>
           <p:cNvSpPr txBox="1"/>
           <p:nvPr/>
         </p:nvSpPr>
@@ -5980,7 +5863,7 @@
       </p:sp>
       <p:sp>
         <p:nvSpPr>
-          <p:cNvPr id="8" name="Rectangle 7"/>
+          <p:cNvPr id="7" name="Rectangle 6"/>
           <p:cNvSpPr/>
           <p:nvPr/>
         </p:nvSpPr>
@@ -6026,7 +5909,7 @@
       </p:sp>
       <p:sp>
         <p:nvSpPr>
-          <p:cNvPr id="9" name="TextBox 8"/>
+          <p:cNvPr id="8" name="TextBox 7"/>
           <p:cNvSpPr txBox="1"/>
           <p:nvPr/>
         </p:nvSpPr>
@@ -6103,7 +5986,7 @@
       </p:sp>
       <p:sp>
         <p:nvSpPr>
-          <p:cNvPr id="10" name="Rectangle 9"/>
+          <p:cNvPr id="9" name="Rectangle 8"/>
           <p:cNvSpPr/>
           <p:nvPr/>
         </p:nvSpPr>
@@ -6147,7 +6030,7 @@
       </p:sp>
       <p:sp>
         <p:nvSpPr>
-          <p:cNvPr id="11" name="TextBox 10"/>
+          <p:cNvPr id="10" name="TextBox 9"/>
           <p:cNvSpPr txBox="1"/>
           <p:nvPr/>
         </p:nvSpPr>
@@ -6279,46 +6162,7 @@
       </p:sp>
       <p:sp>
         <p:nvSpPr>
-          <p:cNvPr id="3" name="TextBox 2"/>
-          <p:cNvSpPr txBox="1"/>
-          <p:nvPr/>
-        </p:nvSpPr>
-        <p:spPr>
-          <a:xfrm>
-            <a:off x="8973007" y="274320"/>
-            <a:ext cx="2743200" cy="274320"/>
-          </a:xfrm>
-          <a:prstGeom prst="rect">
-            <a:avLst/>
-          </a:prstGeom>
-          <a:noFill/>
-        </p:spPr>
-        <p:txBody>
-          <a:bodyPr wrap="square" anchor="t" lIns="0" rIns="0" tIns="0" bIns="0">
-            <a:spAutoFit/>
-          </a:bodyPr>
-          <a:lstStyle/>
-          <a:p>
-            <a:pPr algn="r">
-              <a:spcAft>
-                <a:spcPts val="0"/>
-              </a:spcAft>
-            </a:pPr>
-            <a:r>
-              <a:rPr sz="1150" b="0">
-                <a:solidFill>
-                  <a:srgbClr val="8098A1"/>
-                </a:solidFill>
-                <a:latin typeface="Consolas"/>
-              </a:rPr>
-              <a:t>1:00  |  running 3:50</a:t>
-            </a:r>
-          </a:p>
-        </p:txBody>
-      </p:sp>
-      <p:sp>
-        <p:nvSpPr>
-          <p:cNvPr id="4" name="Rectangle 3"/>
+          <p:cNvPr id="3" name="Rectangle 2"/>
           <p:cNvSpPr/>
           <p:nvPr/>
         </p:nvSpPr>
@@ -6362,7 +6206,7 @@
       </p:sp>
       <p:sp>
         <p:nvSpPr>
-          <p:cNvPr id="5" name="TextBox 4"/>
+          <p:cNvPr id="4" name="TextBox 3"/>
           <p:cNvSpPr txBox="1"/>
           <p:nvPr/>
         </p:nvSpPr>
@@ -6404,7 +6248,7 @@
       </p:sp>
       <p:pic>
         <p:nvPicPr>
-          <p:cNvPr id="6" name="Picture 5" descr="fig4_reliability.png"/>
+          <p:cNvPr id="5" name="Picture 4" descr="fig4_reliability.png"/>
           <p:cNvPicPr>
             <a:picLocks noChangeAspect="1"/>
           </p:cNvPicPr>
@@ -6428,7 +6272,7 @@
       </p:pic>
       <p:sp>
         <p:nvSpPr>
-          <p:cNvPr id="7" name="TextBox 6"/>
+          <p:cNvPr id="6" name="TextBox 5"/>
           <p:cNvSpPr txBox="1"/>
           <p:nvPr/>
         </p:nvSpPr>
@@ -6639,7 +6483,7 @@
       </p:sp>
       <p:sp>
         <p:nvSpPr>
-          <p:cNvPr id="8" name="Rectangle 7"/>
+          <p:cNvPr id="7" name="Rectangle 6"/>
           <p:cNvSpPr/>
           <p:nvPr/>
         </p:nvSpPr>
@@ -6683,7 +6527,7 @@
       </p:sp>
       <p:sp>
         <p:nvSpPr>
-          <p:cNvPr id="9" name="TextBox 8"/>
+          <p:cNvPr id="8" name="TextBox 7"/>
           <p:cNvSpPr txBox="1"/>
           <p:nvPr/>
         </p:nvSpPr>
@@ -6741,7 +6585,7 @@
       </p:sp>
       <p:sp>
         <p:nvSpPr>
-          <p:cNvPr id="10" name="Rectangle 9"/>
+          <p:cNvPr id="9" name="Rectangle 8"/>
           <p:cNvSpPr/>
           <p:nvPr/>
         </p:nvSpPr>
@@ -6785,7 +6629,7 @@
       </p:sp>
       <p:sp>
         <p:nvSpPr>
-          <p:cNvPr id="11" name="TextBox 10"/>
+          <p:cNvPr id="10" name="TextBox 9"/>
           <p:cNvSpPr txBox="1"/>
           <p:nvPr/>
         </p:nvSpPr>
@@ -6917,46 +6761,7 @@
       </p:sp>
       <p:sp>
         <p:nvSpPr>
-          <p:cNvPr id="3" name="TextBox 2"/>
-          <p:cNvSpPr txBox="1"/>
-          <p:nvPr/>
-        </p:nvSpPr>
-        <p:spPr>
-          <a:xfrm>
-            <a:off x="8973007" y="274320"/>
-            <a:ext cx="2743200" cy="274320"/>
-          </a:xfrm>
-          <a:prstGeom prst="rect">
-            <a:avLst/>
-          </a:prstGeom>
-          <a:noFill/>
-        </p:spPr>
-        <p:txBody>
-          <a:bodyPr wrap="square" anchor="t" lIns="0" rIns="0" tIns="0" bIns="0">
-            <a:spAutoFit/>
-          </a:bodyPr>
-          <a:lstStyle/>
-          <a:p>
-            <a:pPr algn="r">
-              <a:spcAft>
-                <a:spcPts val="0"/>
-              </a:spcAft>
-            </a:pPr>
-            <a:r>
-              <a:rPr sz="1150" b="0">
-                <a:solidFill>
-                  <a:srgbClr val="8098A1"/>
-                </a:solidFill>
-                <a:latin typeface="Consolas"/>
-              </a:rPr>
-              <a:t>0:50  |  running 4:40</a:t>
-            </a:r>
-          </a:p>
-        </p:txBody>
-      </p:sp>
-      <p:sp>
-        <p:nvSpPr>
-          <p:cNvPr id="4" name="Rectangle 3"/>
+          <p:cNvPr id="3" name="Rectangle 2"/>
           <p:cNvSpPr/>
           <p:nvPr/>
         </p:nvSpPr>
@@ -7000,7 +6805,7 @@
       </p:sp>
       <p:sp>
         <p:nvSpPr>
-          <p:cNvPr id="5" name="TextBox 4"/>
+          <p:cNvPr id="4" name="TextBox 3"/>
           <p:cNvSpPr txBox="1"/>
           <p:nvPr/>
         </p:nvSpPr>
@@ -7042,7 +6847,7 @@
       </p:sp>
       <p:pic>
         <p:nvPicPr>
-          <p:cNvPr id="6" name="Picture 5" descr="fig5_algorithms.png"/>
+          <p:cNvPr id="5" name="Picture 4" descr="fig5_algorithms.png"/>
           <p:cNvPicPr>
             <a:picLocks noChangeAspect="1"/>
           </p:cNvPicPr>
@@ -7066,7 +6871,7 @@
       </p:pic>
       <p:sp>
         <p:nvSpPr>
-          <p:cNvPr id="7" name="TextBox 6"/>
+          <p:cNvPr id="6" name="TextBox 5"/>
           <p:cNvSpPr txBox="1"/>
           <p:nvPr/>
         </p:nvSpPr>
@@ -7180,7 +6985,7 @@
       </p:sp>
       <p:sp>
         <p:nvSpPr>
-          <p:cNvPr id="8" name="Rectangle 7"/>
+          <p:cNvPr id="7" name="Rectangle 6"/>
           <p:cNvSpPr/>
           <p:nvPr/>
         </p:nvSpPr>
@@ -7224,7 +7029,7 @@
       </p:sp>
       <p:sp>
         <p:nvSpPr>
-          <p:cNvPr id="9" name="TextBox 8"/>
+          <p:cNvPr id="8" name="TextBox 7"/>
           <p:cNvSpPr txBox="1"/>
           <p:nvPr/>
         </p:nvSpPr>
@@ -7282,7 +7087,7 @@
       </p:sp>
       <p:sp>
         <p:nvSpPr>
-          <p:cNvPr id="10" name="Rectangle 9"/>
+          <p:cNvPr id="9" name="Rectangle 8"/>
           <p:cNvSpPr/>
           <p:nvPr/>
         </p:nvSpPr>
@@ -7326,7 +7131,7 @@
       </p:sp>
       <p:sp>
         <p:nvSpPr>
-          <p:cNvPr id="11" name="TextBox 10"/>
+          <p:cNvPr id="10" name="TextBox 9"/>
           <p:cNvSpPr txBox="1"/>
           <p:nvPr/>
         </p:nvSpPr>
@@ -7384,7 +7189,7 @@
       </p:sp>
       <p:sp>
         <p:nvSpPr>
-          <p:cNvPr id="12" name="Rectangle 11"/>
+          <p:cNvPr id="11" name="Rectangle 10"/>
           <p:cNvSpPr/>
           <p:nvPr/>
         </p:nvSpPr>
@@ -7428,7 +7233,7 @@
       </p:sp>
       <p:sp>
         <p:nvSpPr>
-          <p:cNvPr id="13" name="TextBox 12"/>
+          <p:cNvPr id="12" name="TextBox 11"/>
           <p:cNvSpPr txBox="1"/>
           <p:nvPr/>
         </p:nvSpPr>
@@ -7560,46 +7365,7 @@
       </p:sp>
       <p:sp>
         <p:nvSpPr>
-          <p:cNvPr id="3" name="TextBox 2"/>
-          <p:cNvSpPr txBox="1"/>
-          <p:nvPr/>
-        </p:nvSpPr>
-        <p:spPr>
-          <a:xfrm>
-            <a:off x="8973007" y="274320"/>
-            <a:ext cx="2743200" cy="274320"/>
-          </a:xfrm>
-          <a:prstGeom prst="rect">
-            <a:avLst/>
-          </a:prstGeom>
-          <a:noFill/>
-        </p:spPr>
-        <p:txBody>
-          <a:bodyPr wrap="square" anchor="t" lIns="0" rIns="0" tIns="0" bIns="0">
-            <a:spAutoFit/>
-          </a:bodyPr>
-          <a:lstStyle/>
-          <a:p>
-            <a:pPr algn="r">
-              <a:spcAft>
-                <a:spcPts val="0"/>
-              </a:spcAft>
-            </a:pPr>
-            <a:r>
-              <a:rPr sz="1150" b="0">
-                <a:solidFill>
-                  <a:srgbClr val="8098A1"/>
-                </a:solidFill>
-                <a:latin typeface="Consolas"/>
-              </a:rPr>
-              <a:t>0:20  |  running 5:00</a:t>
-            </a:r>
-          </a:p>
-        </p:txBody>
-      </p:sp>
-      <p:sp>
-        <p:nvSpPr>
-          <p:cNvPr id="4" name="Rectangle 3"/>
+          <p:cNvPr id="3" name="Rectangle 2"/>
           <p:cNvSpPr/>
           <p:nvPr/>
         </p:nvSpPr>
@@ -7643,7 +7409,7 @@
       </p:sp>
       <p:sp>
         <p:nvSpPr>
-          <p:cNvPr id="5" name="TextBox 4"/>
+          <p:cNvPr id="4" name="TextBox 3"/>
           <p:cNvSpPr txBox="1"/>
           <p:nvPr/>
         </p:nvSpPr>
@@ -7685,7 +7451,7 @@
       </p:sp>
       <p:sp>
         <p:nvSpPr>
-          <p:cNvPr id="6" name="Rectangle 5"/>
+          <p:cNvPr id="5" name="Rectangle 4"/>
           <p:cNvSpPr/>
           <p:nvPr/>
         </p:nvSpPr>
@@ -7731,7 +7497,7 @@
       </p:sp>
       <p:sp>
         <p:nvSpPr>
-          <p:cNvPr id="7" name="TextBox 6"/>
+          <p:cNvPr id="6" name="TextBox 5"/>
           <p:cNvSpPr txBox="1"/>
           <p:nvPr/>
         </p:nvSpPr>
@@ -7808,7 +7574,7 @@
       </p:sp>
       <p:sp>
         <p:nvSpPr>
-          <p:cNvPr id="8" name="Rectangle 7"/>
+          <p:cNvPr id="7" name="Rectangle 6"/>
           <p:cNvSpPr/>
           <p:nvPr/>
         </p:nvSpPr>
@@ -7854,7 +7620,7 @@
       </p:sp>
       <p:sp>
         <p:nvSpPr>
-          <p:cNvPr id="9" name="TextBox 8"/>
+          <p:cNvPr id="8" name="TextBox 7"/>
           <p:cNvSpPr txBox="1"/>
           <p:nvPr/>
         </p:nvSpPr>
@@ -7931,7 +7697,7 @@
       </p:sp>
       <p:sp>
         <p:nvSpPr>
-          <p:cNvPr id="10" name="Rectangle 9"/>
+          <p:cNvPr id="9" name="Rectangle 8"/>
           <p:cNvSpPr/>
           <p:nvPr/>
         </p:nvSpPr>
@@ -7977,7 +7743,7 @@
       </p:sp>
       <p:sp>
         <p:nvSpPr>
-          <p:cNvPr id="11" name="TextBox 10"/>
+          <p:cNvPr id="10" name="TextBox 9"/>
           <p:cNvSpPr txBox="1"/>
           <p:nvPr/>
         </p:nvSpPr>
@@ -8054,7 +7820,7 @@
       </p:sp>
       <p:sp>
         <p:nvSpPr>
-          <p:cNvPr id="12" name="Rectangle 11"/>
+          <p:cNvPr id="11" name="Rectangle 10"/>
           <p:cNvSpPr/>
           <p:nvPr/>
         </p:nvSpPr>
@@ -8100,7 +7866,7 @@
       </p:sp>
       <p:sp>
         <p:nvSpPr>
-          <p:cNvPr id="13" name="TextBox 12"/>
+          <p:cNvPr id="12" name="TextBox 11"/>
           <p:cNvSpPr txBox="1"/>
           <p:nvPr/>
         </p:nvSpPr>
@@ -8177,7 +7943,7 @@
       </p:sp>
       <p:sp>
         <p:nvSpPr>
-          <p:cNvPr id="14" name="TextBox 13"/>
+          <p:cNvPr id="13" name="TextBox 12"/>
           <p:cNvSpPr txBox="1"/>
           <p:nvPr/>
         </p:nvSpPr>
@@ -8219,7 +7985,7 @@
       </p:sp>
       <p:sp>
         <p:nvSpPr>
-          <p:cNvPr id="15" name="Rectangle 14"/>
+          <p:cNvPr id="14" name="Rectangle 13"/>
           <p:cNvSpPr/>
           <p:nvPr/>
         </p:nvSpPr>
@@ -8263,7 +8029,7 @@
       </p:sp>
       <p:sp>
         <p:nvSpPr>
-          <p:cNvPr id="16" name="TextBox 15"/>
+          <p:cNvPr id="15" name="TextBox 14"/>
           <p:cNvSpPr txBox="1"/>
           <p:nvPr/>
         </p:nvSpPr>
@@ -8321,7 +8087,7 @@
       </p:sp>
       <p:sp>
         <p:nvSpPr>
-          <p:cNvPr id="17" name="TextBox 16"/>
+          <p:cNvPr id="16" name="TextBox 15"/>
           <p:cNvSpPr txBox="1"/>
           <p:nvPr/>
         </p:nvSpPr>

--- a/build/CLL798_prelim_5min.pptx
+++ b/build/CLL798_prelim_5min.pptx
@@ -12,6 +12,7 @@
     <p:sldId id="260" r:id="rId12"/>
     <p:sldId id="261" r:id="rId13"/>
     <p:sldId id="262" r:id="rId14"/>
+    <p:sldId id="263" r:id="rId15"/>
   </p:sldIdLst>
   <p:sldSz cx="12191695" cy="6858000" type="screen4x3"/>
   <p:notesSz cx="6858000" cy="9144000"/>
@@ -929,6 +930,76 @@
           <a:p>
             <a:r>
               <a:t>CLOSE - 20 s. One sentence: terrain belongs in the edge weight, pressure class belongs in the constraints, reliability belongs in the objective. Then stop and take questions. Do NOT read the four numbers aloud - they are there for the audience to scan.</a:t>
+            </a:r>
+          </a:p>
+        </p:txBody>
+      </p:sp>
+      <p:sp>
+        <p:nvSpPr>
+          <p:cNvPr id="4" name="Slide Number Placeholder 3"/>
+          <p:cNvSpPr>
+            <a:spLocks noGrp="1"/>
+          </p:cNvSpPr>
+          <p:nvPr>
+            <p:ph type="sldNum" idx="5" sz="quarter"/>
+          </p:nvPr>
+        </p:nvSpPr>
+        <p:spPr/>
+      </p:sp>
+    </p:spTree>
+  </p:cSld>
+  <p:clrMapOvr>
+    <a:masterClrMapping/>
+  </p:clrMapOvr>
+</p:notes>
+</file>
+
+<file path=ppt/notesSlides/notesSlide8.xml><?xml version="1.0" encoding="utf-8"?>
+<p:notes xmlns:a="http://schemas.openxmlformats.org/drawingml/2006/main" xmlns:p="http://schemas.openxmlformats.org/presentationml/2006/main" xmlns:r="http://schemas.openxmlformats.org/officeDocument/2006/relationships">
+  <p:cSld>
+    <p:spTree>
+      <p:nvGrpSpPr>
+        <p:cNvPr id="1" name=""/>
+        <p:cNvGrpSpPr/>
+        <p:nvPr/>
+      </p:nvGrpSpPr>
+      <p:grpSpPr>
+        <a:xfrm>
+          <a:off x="0" y="0"/>
+          <a:ext cx="0" cy="0"/>
+          <a:chOff x="0" y="0"/>
+          <a:chExt cx="0" cy="0"/>
+        </a:xfrm>
+      </p:grpSpPr>
+      <p:sp>
+        <p:nvSpPr>
+          <p:cNvPr id="2" name="Slide Image Placeholder 1"/>
+          <p:cNvSpPr>
+            <a:spLocks noGrp="1"/>
+          </p:cNvSpPr>
+          <p:nvPr>
+            <p:ph type="sldImg" idx="2"/>
+          </p:nvPr>
+        </p:nvSpPr>
+        <p:spPr/>
+      </p:sp>
+      <p:sp>
+        <p:nvSpPr>
+          <p:cNvPr id="3" name="Notes Placeholder 2"/>
+          <p:cNvSpPr>
+            <a:spLocks noGrp="1"/>
+          </p:cNvSpPr>
+          <p:nvPr>
+            <p:ph type="body" idx="3" sz="quarter"/>
+          </p:nvPr>
+        </p:nvSpPr>
+        <p:spPr/>
+        <p:txBody>
+          <a:bodyPr/>
+          <a:lstStyle/>
+          <a:p>
+            <a:r>
+              <a:t>BACKUP - do not present. Jump here in QnA if asked what an abbreviation means or where a number came from. Full provenance for every value is in docs/DATA_SOURCES.md.</a:t>
             </a:r>
           </a:p>
         </p:txBody>
@@ -4059,8 +4130,8 @@
         </p:nvSpPr>
         <p:spPr>
           <a:xfrm>
-            <a:off x="475488" y="3520440"/>
-            <a:ext cx="8595360" cy="1097280"/>
+            <a:off x="475488" y="3383280"/>
+            <a:ext cx="9692640" cy="1645920"/>
           </a:xfrm>
           <a:prstGeom prst="rect">
             <a:avLst/>
@@ -4078,17 +4149,36 @@
                 <a:spcPct val="105000"/>
               </a:lnSpc>
               <a:spcAft>
+                <a:spcPts val="1100"/>
+              </a:spcAft>
+            </a:pPr>
+            <a:r>
+              <a:rPr sz="1600" b="0">
+                <a:solidFill>
+                  <a:srgbClr val="B9CDD4"/>
+                </a:solidFill>
+                <a:latin typeface="Segoe UI"/>
+              </a:rPr>
+              <a:t>Graph-theoretic topology optimisation of district-heating pipe networks — on two real German networks, real satellite elevation data, and a transport-phenomena cost model.</a:t>
+            </a:r>
+          </a:p>
+          <a:p>
+            <a:pPr algn="l">
+              <a:lnSpc>
+                <a:spcPct val="100000"/>
+              </a:lnSpc>
+              <a:spcAft>
                 <a:spcPts val="0"/>
               </a:spcAft>
             </a:pPr>
             <a:r>
-              <a:rPr sz="1600" b="0">
-                <a:solidFill>
-                  <a:srgbClr val="B9CDD4"/>
-                </a:solidFill>
-                <a:latin typeface="Segoe UI"/>
-              </a:rPr>
-              <a:t>Graph-theoretic topology optimisation of district-heating pipe networks — on two real German networks, real SRTM terrain, and a transport-phenomena cost model.</a:t>
+              <a:rPr sz="1150" b="0">
+                <a:solidFill>
+                  <a:srgbClr val="8098A1"/>
+                </a:solidFill>
+                <a:latin typeface="Consolas"/>
+              </a:rPr>
+              <a:t>MST = Minimum Spanning Tree    ·    TAC = Total Annual Cost    ·    SRTM = Shuttle Radar Topography Mission</a:t>
             </a:r>
           </a:p>
         </p:txBody>
@@ -4182,7 +4272,7 @@
                 </a:solidFill>
                 <a:latin typeface="Consolas"/>
               </a:rPr>
-              <a:t>TERRAIN</a:t>
+              <a:t>ELEVATION DATA</a:t>
             </a:r>
           </a:p>
           <a:p>
@@ -4198,7 +4288,7 @@
                 </a:solidFill>
                 <a:latin typeface="Segoe UI"/>
               </a:rPr>
-              <a:t>NASA SRTM 30 m</a:t>
+              <a:t>NASA SRTM, 30 m grid</a:t>
             </a:r>
           </a:p>
         </p:txBody>
@@ -4517,8 +4607,8 @@
         </p:blipFill>
         <p:spPr>
           <a:xfrm>
-            <a:off x="475488" y="1600200"/>
-            <a:ext cx="7360920" cy="5159143"/>
+            <a:off x="475488" y="1572768"/>
+            <a:ext cx="7269480" cy="5095054"/>
           </a:xfrm>
           <a:prstGeom prst="rect">
             <a:avLst/>
@@ -4533,8 +4623,8 @@
         </p:nvSpPr>
         <p:spPr>
           <a:xfrm>
-            <a:off x="8110727" y="1600200"/>
-            <a:ext cx="3605479" cy="1371600"/>
+            <a:off x="475488" y="6217920"/>
+            <a:ext cx="7269480" cy="621792"/>
           </a:xfrm>
           <a:prstGeom prst="rect">
             <a:avLst/>
@@ -4548,6 +4638,48 @@
           <a:lstStyle/>
           <a:p>
             <a:pPr algn="l">
+              <a:lnSpc>
+                <a:spcPct val="100000"/>
+              </a:lnSpc>
+              <a:spcAft>
+                <a:spcPts val="0"/>
+              </a:spcAft>
+            </a:pPr>
+            <a:r>
+              <a:rPr sz="1200" b="0">
+                <a:solidFill>
+                  <a:srgbClr val="B9CDD4"/>
+                </a:solidFill>
+                <a:latin typeface="Segoe UI"/>
+              </a:rPr>
+              <a:t>A district-heating network pipes hot water from one central plant to every building in a city district. The buried pipe layout is 80-90 % of lifetime cost, so choosing the topology IS the design decision.</a:t>
+            </a:r>
+          </a:p>
+        </p:txBody>
+      </p:sp>
+      <p:sp>
+        <p:nvSpPr>
+          <p:cNvPr id="7" name="TextBox 6"/>
+          <p:cNvSpPr txBox="1"/>
+          <p:nvPr/>
+        </p:nvSpPr>
+        <p:spPr>
+          <a:xfrm>
+            <a:off x="8110727" y="1572768"/>
+            <a:ext cx="3605479" cy="2057400"/>
+          </a:xfrm>
+          <a:prstGeom prst="rect">
+            <a:avLst/>
+          </a:prstGeom>
+          <a:noFill/>
+        </p:spPr>
+        <p:txBody>
+          <a:bodyPr wrap="square" anchor="t" lIns="0" rIns="0" tIns="0" bIns="0">
+            <a:spAutoFit/>
+          </a:bodyPr>
+          <a:lstStyle/>
+          <a:p>
+            <a:pPr algn="l">
               <a:spcAft>
                 <a:spcPts val="600"/>
               </a:spcAft>
@@ -4569,7 +4701,7 @@
               </a:spcAft>
             </a:pPr>
             <a:r>
-              <a:rPr sz="1300" b="0">
+              <a:rPr sz="1250" b="0">
                 <a:solidFill>
                   <a:srgbClr val="EAF2F2"/>
                 </a:solidFill>
@@ -4585,7 +4717,7 @@
               </a:spcAft>
             </a:pPr>
             <a:r>
-              <a:rPr sz="1300" b="0">
+              <a:rPr sz="1250" b="0">
                 <a:solidFill>
                   <a:srgbClr val="EAF2F2"/>
                 </a:solidFill>
@@ -4601,7 +4733,7 @@
               </a:spcAft>
             </a:pPr>
             <a:r>
-              <a:rPr sz="1300" b="0">
+              <a:rPr sz="1250" b="0">
                 <a:solidFill>
                   <a:srgbClr val="EAF2F2"/>
                 </a:solidFill>
@@ -4613,49 +4745,68 @@
           <a:p>
             <a:pPr>
               <a:spcAft>
+                <a:spcPts val="900"/>
+              </a:spcAft>
+            </a:pPr>
+            <a:r>
+              <a:rPr sz="1250" b="0">
+                <a:solidFill>
+                  <a:srgbClr val="EAF2F2"/>
+                </a:solidFill>
+                <a:latin typeface="Consolas"/>
+              </a:rPr>
+              <a:t>candidates = </a:t>
+            </a:r>
+            <a:r>
+              <a:rPr sz="1250" b="1">
+                <a:solidFill>
+                  <a:srgbClr val="FF7A3D"/>
+                </a:solidFill>
+                <a:latin typeface="Consolas"/>
+              </a:rPr>
+              <a:t>41</a:t>
+            </a:r>
+            <a:r>
+              <a:rPr sz="1250" b="1">
+                <a:solidFill>
+                  <a:srgbClr val="FF7A3D"/>
+                </a:solidFill>
+                <a:latin typeface="Consolas"/>
+              </a:rPr>
+              <a:t>^39 ~ 10^62</a:t>
+            </a:r>
+          </a:p>
+          <a:p>
+            <a:pPr algn="l">
+              <a:lnSpc>
+                <a:spcPct val="98000"/>
+              </a:lnSpc>
+              <a:spcAft>
                 <a:spcPts val="0"/>
               </a:spcAft>
             </a:pPr>
             <a:r>
-              <a:rPr sz="1300" b="0">
-                <a:solidFill>
-                  <a:srgbClr val="EAF2F2"/>
-                </a:solidFill>
-                <a:latin typeface="Consolas"/>
-              </a:rPr>
-              <a:t>candidates = </a:t>
-            </a:r>
-            <a:r>
-              <a:rPr sz="1300" b="1">
-                <a:solidFill>
-                  <a:srgbClr val="FF7A3D"/>
-                </a:solidFill>
-                <a:latin typeface="Consolas"/>
-              </a:rPr>
-              <a:t>41</a:t>
-            </a:r>
-            <a:r>
-              <a:rPr sz="1300" b="1">
-                <a:solidFill>
-                  <a:srgbClr val="FF7A3D"/>
-                </a:solidFill>
-                <a:latin typeface="Consolas"/>
-              </a:rPr>
-              <a:t>^39 ≈ 10^62</a:t>
-            </a:r>
-          </a:p>
-        </p:txBody>
-      </p:sp>
-      <p:sp>
-        <p:nvSpPr>
-          <p:cNvPr id="7" name="Rectangle 6"/>
+              <a:rPr sz="1150" b="0">
+                <a:solidFill>
+                  <a:srgbClr val="5AD2A8"/>
+                </a:solidFill>
+                <a:latin typeface="Segoe UI"/>
+              </a:rPr>
+              <a:t>Minimum Spanning Tree (MST): the cheapest loop-free layout that still reaches every consumer.</a:t>
+            </a:r>
+          </a:p>
+        </p:txBody>
+      </p:sp>
+      <p:sp>
+        <p:nvSpPr>
+          <p:cNvPr id="8" name="Rectangle 7"/>
           <p:cNvSpPr/>
           <p:nvPr/>
         </p:nvSpPr>
         <p:spPr>
           <a:xfrm>
-            <a:off x="8110727" y="3246120"/>
-            <a:ext cx="3605479" cy="1051560"/>
+            <a:off x="8110727" y="3712463"/>
+            <a:ext cx="3605479" cy="969264"/>
           </a:xfrm>
           <a:prstGeom prst="rect">
             <a:avLst/>
@@ -4694,14 +4845,14 @@
       </p:sp>
       <p:sp>
         <p:nvSpPr>
-          <p:cNvPr id="8" name="TextBox 7"/>
+          <p:cNvPr id="9" name="TextBox 8"/>
           <p:cNvSpPr txBox="1"/>
           <p:nvPr/>
         </p:nvSpPr>
         <p:spPr>
           <a:xfrm>
-            <a:off x="8257031" y="3374136"/>
-            <a:ext cx="3312871" cy="795527"/>
+            <a:off x="8257031" y="3840479"/>
+            <a:ext cx="3312871" cy="713232"/>
           </a:xfrm>
           <a:prstGeom prst="rect">
             <a:avLst/>
@@ -4726,7 +4877,7 @@
                 </a:solidFill>
                 <a:latin typeface="Consolas"/>
               </a:rPr>
-              <a:t>REAL DEMAND</a:t>
+              <a:t>REAL HEAT DEMAND</a:t>
             </a:r>
           </a:p>
           <a:p>
@@ -4764,21 +4915,21 @@
                 </a:solidFill>
                 <a:latin typeface="Segoe UI"/>
               </a:rPr>
-              <a:t>67,314 households, from the AixDHN census dataset</a:t>
-            </a:r>
-          </a:p>
-        </p:txBody>
-      </p:sp>
-      <p:sp>
-        <p:nvSpPr>
-          <p:cNvPr id="9" name="Rectangle 8"/>
+              <a:t>67,314 households (AixDHN, RWTH Aachen)</a:t>
+            </a:r>
+          </a:p>
+        </p:txBody>
+      </p:sp>
+      <p:sp>
+        <p:nvSpPr>
+          <p:cNvPr id="10" name="Rectangle 9"/>
           <p:cNvSpPr/>
           <p:nvPr/>
         </p:nvSpPr>
         <p:spPr>
           <a:xfrm>
-            <a:off x="8110727" y="4434840"/>
-            <a:ext cx="3605479" cy="1051560"/>
+            <a:off x="8110727" y="4773168"/>
+            <a:ext cx="3605479" cy="1115568"/>
           </a:xfrm>
           <a:prstGeom prst="rect">
             <a:avLst/>
@@ -4817,14 +4968,14 @@
       </p:sp>
       <p:sp>
         <p:nvSpPr>
-          <p:cNvPr id="10" name="TextBox 9"/>
+          <p:cNvPr id="11" name="TextBox 10"/>
           <p:cNvSpPr txBox="1"/>
           <p:nvPr/>
         </p:nvSpPr>
         <p:spPr>
           <a:xfrm>
-            <a:off x="8257031" y="4562855"/>
-            <a:ext cx="3312871" cy="795527"/>
+            <a:off x="8257031" y="4901183"/>
+            <a:ext cx="3312871" cy="859536"/>
           </a:xfrm>
           <a:prstGeom prst="rect">
             <a:avLst/>
@@ -4849,7 +5000,7 @@
                 </a:solidFill>
                 <a:latin typeface="Consolas"/>
               </a:rPr>
-              <a:t>REAL TERRAIN</a:t>
+              <a:t>REAL ELEVATION</a:t>
             </a:r>
           </a:p>
           <a:p>
@@ -4868,7 +5019,7 @@
                 </a:solidFill>
                 <a:latin typeface="Segoe UI"/>
               </a:rPr>
-              <a:t>29,248 pts</a:t>
+              <a:t>29,248 points</a:t>
             </a:r>
           </a:p>
           <a:p>
@@ -4887,21 +5038,21 @@
                 </a:solidFill>
                 <a:latin typeface="Segoe UI"/>
               </a:rPr>
-              <a:t>NASA SRTM 30 m, sampled every 25 m along each route</a:t>
-            </a:r>
-          </a:p>
-        </p:txBody>
-      </p:sp>
-      <p:sp>
-        <p:nvSpPr>
-          <p:cNvPr id="11" name="Rectangle 10"/>
+              <a:t>NASA satellite data, sampled every 25 m along every candidate route</a:t>
+            </a:r>
+          </a:p>
+        </p:txBody>
+      </p:sp>
+      <p:sp>
+        <p:nvSpPr>
+          <p:cNvPr id="12" name="Rectangle 11"/>
           <p:cNvSpPr/>
           <p:nvPr/>
         </p:nvSpPr>
         <p:spPr>
           <a:xfrm>
-            <a:off x="8110727" y="5623560"/>
-            <a:ext cx="3605479" cy="914400"/>
+            <a:off x="8110727" y="5998464"/>
+            <a:ext cx="3605479" cy="841248"/>
           </a:xfrm>
           <a:prstGeom prst="rect">
             <a:avLst/>
@@ -4940,14 +5091,14 @@
       </p:sp>
       <p:sp>
         <p:nvSpPr>
-          <p:cNvPr id="12" name="TextBox 11"/>
+          <p:cNvPr id="13" name="TextBox 12"/>
           <p:cNvSpPr txBox="1"/>
           <p:nvPr/>
         </p:nvSpPr>
         <p:spPr>
           <a:xfrm>
-            <a:off x="8257031" y="5751576"/>
-            <a:ext cx="3312871" cy="658368"/>
+            <a:off x="8257031" y="6126479"/>
+            <a:ext cx="3312871" cy="585216"/>
           </a:xfrm>
           <a:prstGeom prst="rect">
             <a:avLst/>
@@ -4972,7 +5123,7 @@
                 </a:solidFill>
                 <a:latin typeface="Consolas"/>
               </a:rPr>
-              <a:t>RELIEF CONTRAST</a:t>
+              <a:t>RELIEF = HEIGHT RANGE</a:t>
             </a:r>
           </a:p>
           <a:p>
@@ -5010,7 +5161,7 @@
                 </a:solidFill>
                 <a:latin typeface="Segoe UI"/>
               </a:rPr>
-              <a:t>Bremen against Stuttgart</a:t>
+              <a:t>flat Bremen vs hilly Stuttgart</a:t>
             </a:r>
           </a:p>
         </p:txBody>
@@ -5298,7 +5449,7 @@
                 </a:solidFill>
                 <a:latin typeface="Segoe UI"/>
               </a:rPr>
-              <a:t>−3.0 % TAC</a:t>
+              <a:t>−3.0 % cost</a:t>
             </a:r>
           </a:p>
           <a:p>
@@ -5317,7 +5468,7 @@
                 </a:solidFill>
                 <a:latin typeface="Segoe UI"/>
               </a:rPr>
-              <a:t>23.09 → 22.39 EUR/MWh, for a tree that is 0.03 km LONGER</a:t>
+              <a:t>total annual cost 23.09 → 22.39 EUR per MWh delivered, for a tree that is 0.03 km LONGER</a:t>
             </a:r>
           </a:p>
         </p:txBody>
@@ -5453,8 +5604,8 @@
         </p:nvSpPr>
         <p:spPr>
           <a:xfrm>
-            <a:off x="7973567" y="5184648"/>
-            <a:ext cx="41148" cy="1097280"/>
+            <a:off x="7973567" y="5157216"/>
+            <a:ext cx="41148" cy="1152144"/>
           </a:xfrm>
           <a:prstGeom prst="rect">
             <a:avLst/>
@@ -5497,8 +5648,8 @@
         </p:nvSpPr>
         <p:spPr>
           <a:xfrm>
-            <a:off x="8156447" y="5202936"/>
-            <a:ext cx="3523183" cy="1097280"/>
+            <a:off x="8156447" y="5175503"/>
+            <a:ext cx="3523183" cy="1152144"/>
           </a:xfrm>
           <a:prstGeom prst="rect">
             <a:avLst/>
@@ -5523,7 +5674,7 @@
                 </a:solidFill>
                 <a:latin typeface="Consolas"/>
               </a:rPr>
-              <a:t>WHY IT MATTERS</a:t>
+              <a:t>WHAT WE CHANGED</a:t>
             </a:r>
           </a:p>
           <a:p>
@@ -5542,7 +5693,7 @@
                 </a:solidFill>
                 <a:latin typeface="Segoe UI"/>
               </a:rPr>
-              <a:t>Minimising length and minimising cost are the same problem only on flat ground. The saving is free — same algorithm, better edge weight.</a:t>
+              <a:t>Edge weight is no longer straight-line distance, but true slope length × a trenching multiplier that rises with gradient. Minimum length = minimum cost only on flat ground.</a:t>
             </a:r>
           </a:p>
         </p:txBody>
@@ -5822,7 +5973,7 @@
                 </a:solidFill>
                 <a:latin typeface="Consolas"/>
               </a:rPr>
-              <a:t>PN16 pipe class     </a:t>
+              <a:t>PN16 pipe rating    </a:t>
             </a:r>
             <a:r>
               <a:rPr sz="1350" b="1">
@@ -5869,8 +6020,8 @@
         </p:nvSpPr>
         <p:spPr>
           <a:xfrm>
-            <a:off x="8522208" y="3703320"/>
-            <a:ext cx="3193999" cy="1051560"/>
+            <a:off x="8522208" y="3675887"/>
+            <a:ext cx="3193999" cy="1389888"/>
           </a:xfrm>
           <a:prstGeom prst="rect">
             <a:avLst/>
@@ -5915,8 +6066,8 @@
         </p:nvSpPr>
         <p:spPr>
           <a:xfrm>
-            <a:off x="8668512" y="3831335"/>
-            <a:ext cx="2901391" cy="795527"/>
+            <a:off x="8668512" y="3803903"/>
+            <a:ext cx="2901391" cy="1133856"/>
           </a:xfrm>
           <a:prstGeom prst="rect">
             <a:avLst/>
@@ -5979,7 +6130,7 @@
                 </a:solidFill>
                 <a:latin typeface="Segoe UI"/>
               </a:rPr>
-              <a:t>an exchanger station breaks the static column</a:t>
+              <a:t>PN16 = Pressure Nominal: pipe rated to 16 bar. An exchanger station splits the network so neither half exceeds it.</a:t>
             </a:r>
           </a:p>
         </p:txBody>
@@ -5992,8 +6143,8 @@
         </p:nvSpPr>
         <p:spPr>
           <a:xfrm>
-            <a:off x="8522208" y="4983480"/>
-            <a:ext cx="41148" cy="1554480"/>
+            <a:off x="8522208" y="5248656"/>
+            <a:ext cx="41148" cy="1463040"/>
           </a:xfrm>
           <a:prstGeom prst="rect">
             <a:avLst/>
@@ -6036,8 +6187,8 @@
         </p:nvSpPr>
         <p:spPr>
           <a:xfrm>
-            <a:off x="8705088" y="5001768"/>
-            <a:ext cx="2974543" cy="1554480"/>
+            <a:off x="8705088" y="5266944"/>
+            <a:ext cx="2974543" cy="1463040"/>
           </a:xfrm>
           <a:prstGeom prst="rect">
             <a:avLst/>
@@ -6294,7 +6445,7 @@
           <a:p>
             <a:pPr algn="l">
               <a:spcAft>
-                <a:spcPts val="800"/>
+                <a:spcPts val="600"/>
               </a:spcAft>
             </a:pPr>
             <a:r>
@@ -6304,7 +6455,7 @@
                 </a:solidFill>
                 <a:latin typeface="Consolas"/>
               </a:rPr>
-              <a:t>STUTTGART · WORST SINGLE PIPE FAILURE</a:t>
+              <a:t>STUTTGART  ·  N-1 = LOSS OF ANY ONE PIPE</a:t>
             </a:r>
           </a:p>
           <a:p>
@@ -6314,6 +6465,49 @@
               </a:spcAft>
             </a:pPr>
             <a:r>
+              <a:rPr sz="1000" b="0">
+                <a:solidFill>
+                  <a:srgbClr val="8098A1"/>
+                </a:solidFill>
+                <a:latin typeface="Consolas"/>
+              </a:rPr>
+              <a:t>topology         </a:t>
+            </a:r>
+            <a:r>
+              <a:rPr sz="1000" b="0">
+                <a:solidFill>
+                  <a:srgbClr val="8098A1"/>
+                </a:solidFill>
+                <a:latin typeface="Consolas"/>
+              </a:rPr>
+              <a:t>EUR/MWh  </a:t>
+            </a:r>
+            <a:r>
+              <a:rPr sz="1000" b="0">
+                <a:solidFill>
+                  <a:srgbClr val="8098A1"/>
+                </a:solidFill>
+                <a:latin typeface="Consolas"/>
+              </a:rPr>
+              <a:t>brdg  </a:t>
+            </a:r>
+            <a:r>
+              <a:rPr sz="1000" b="0">
+                <a:solidFill>
+                  <a:srgbClr val="8098A1"/>
+                </a:solidFill>
+                <a:latin typeface="Consolas"/>
+              </a:rPr>
+              <a:t>served</a:t>
+            </a:r>
+          </a:p>
+          <a:p>
+            <a:pPr>
+              <a:spcAft>
+                <a:spcPts val="500"/>
+              </a:spcAft>
+            </a:pPr>
+            <a:r>
               <a:rPr sz="1150" b="0">
                 <a:solidFill>
                   <a:srgbClr val="B9CDD4"/>
@@ -6406,7 +6600,7 @@
                 </a:solidFill>
                 <a:latin typeface="Consolas"/>
               </a:rPr>
-              <a:t>RSMT (cheapest) </a:t>
+              <a:t>RSMT Steiner    </a:t>
             </a:r>
             <a:r>
               <a:rPr sz="1150" b="0">
@@ -6489,8 +6683,8 @@
         </p:nvSpPr>
         <p:spPr>
           <a:xfrm>
-            <a:off x="8385048" y="3977639"/>
-            <a:ext cx="41148" cy="1371600"/>
+            <a:off x="8385048" y="4041648"/>
+            <a:ext cx="41148" cy="1536192"/>
           </a:xfrm>
           <a:prstGeom prst="rect">
             <a:avLst/>
@@ -6533,8 +6727,8 @@
         </p:nvSpPr>
         <p:spPr>
           <a:xfrm>
-            <a:off x="8567928" y="3995927"/>
-            <a:ext cx="3111703" cy="1371600"/>
+            <a:off x="8567928" y="4059935"/>
+            <a:ext cx="3111703" cy="1536192"/>
           </a:xfrm>
           <a:prstGeom prst="rect">
             <a:avLst/>
@@ -6559,7 +6753,7 @@
                 </a:solidFill>
                 <a:latin typeface="Consolas"/>
               </a:rPr>
-              <a:t>ANSWERING THE FAULT QUESTION</a:t>
+              <a:t>DOES A STEINER TREE FIX IT?</a:t>
             </a:r>
           </a:p>
           <a:p>
@@ -6578,7 +6772,7 @@
                 </a:solidFill>
                 <a:latin typeface="Segoe UI"/>
               </a:rPr>
-              <a:t>A Steiner tree is still a tree. It buys length — RSMT is the cheapest topology — but concentrates flow into shared trunks, so it is MORE fragile.</a:t>
+              <a:t>RSMT = Rectilinear Steiner Minimal Tree: extra junction points are allowed, so it is shorter and cheapest here. But it is still a TREE, and it concentrates flow into shared trunks — so it is MORE fragile, not less.</a:t>
             </a:r>
           </a:p>
         </p:txBody>
@@ -6591,8 +6785,8 @@
         </p:nvSpPr>
         <p:spPr>
           <a:xfrm>
-            <a:off x="8385048" y="5532120"/>
-            <a:ext cx="41148" cy="1005840"/>
+            <a:off x="8385048" y="5742432"/>
+            <a:ext cx="41148" cy="1051560"/>
           </a:xfrm>
           <a:prstGeom prst="rect">
             <a:avLst/>
@@ -6635,8 +6829,8 @@
         </p:nvSpPr>
         <p:spPr>
           <a:xfrm>
-            <a:off x="8567928" y="5550407"/>
-            <a:ext cx="3111703" cy="1005840"/>
+            <a:off x="8567928" y="5760720"/>
+            <a:ext cx="3111703" cy="1051560"/>
           </a:xfrm>
           <a:prstGeom prst="rect">
             <a:avLst/>
@@ -6661,7 +6855,7 @@
                 </a:solidFill>
                 <a:latin typeface="Consolas"/>
               </a:rPr>
-              <a:t>THE FIX COSTS 4.3 %</a:t>
+              <a:t>ONLY A LOOP FIXES IT — FOR 4.3 %</a:t>
             </a:r>
           </a:p>
           <a:p>
@@ -6680,7 +6874,7 @@
                 </a:solidFill>
                 <a:latin typeface="Segoe UI"/>
               </a:rPr>
-              <a:t>One redundant pipe: −57 % expected unserved demand, N−1 survival 0 → 68 %.</a:t>
+              <a:t>One redundant pipe: −57 % Expected Unserved Demand (EUD); N-1 survival rises 0 → 68 %.</a:t>
             </a:r>
           </a:p>
         </p:txBody>
@@ -7195,8 +7389,8 @@
         </p:nvSpPr>
         <p:spPr>
           <a:xfrm>
-            <a:off x="7287768" y="5852160"/>
-            <a:ext cx="41148" cy="868680"/>
+            <a:off x="7287768" y="5797296"/>
+            <a:ext cx="41148" cy="932688"/>
           </a:xfrm>
           <a:prstGeom prst="rect">
             <a:avLst/>
@@ -7239,8 +7433,8 @@
         </p:nvSpPr>
         <p:spPr>
           <a:xfrm>
-            <a:off x="7470648" y="5870448"/>
-            <a:ext cx="4208983" cy="868680"/>
+            <a:off x="7470648" y="5815583"/>
+            <a:ext cx="4208983" cy="932688"/>
           </a:xfrm>
           <a:prstGeom prst="rect">
             <a:avLst/>
@@ -7284,7 +7478,7 @@
                 </a:solidFill>
                 <a:latin typeface="Segoe UI"/>
               </a:rPr>
-              <a:t>Reported ESMT/MST = 0.86555 sits below the proved Du–Hwang bound √3/2 = 0.86603.</a:t>
+              <a:t>Their Euclidean Steiner / MST length ratio 0.86555 sits below the proved Du-Hwang lower bound √3/2 = 0.86603.</a:t>
             </a:r>
           </a:p>
         </p:txBody>
@@ -8139,6 +8333,789 @@
                 <a:latin typeface="Segoe UI"/>
               </a:rPr>
               <a:t>AixDHN (RWTH Aachen, MIT)  ·  NASA SRTM 30 m  ·  EN 253  ·  Eurostat  ·  Persson &amp; Werner (2011)</a:t>
+            </a:r>
+          </a:p>
+        </p:txBody>
+      </p:sp>
+    </p:spTree>
+  </p:cSld>
+  <p:clrMapOvr>
+    <a:masterClrMapping/>
+  </p:clrMapOvr>
+</p:sld>
+</file>
+
+<file path=ppt/slides/slide8.xml><?xml version="1.0" encoding="utf-8"?>
+<p:sld xmlns:a="http://schemas.openxmlformats.org/drawingml/2006/main" xmlns:p="http://schemas.openxmlformats.org/presentationml/2006/main" xmlns:r="http://schemas.openxmlformats.org/officeDocument/2006/relationships">
+  <p:cSld>
+    <p:bg>
+      <p:bgPr>
+        <a:solidFill>
+          <a:srgbClr val="0D1A1F"/>
+        </a:solidFill>
+        <a:effectLst/>
+      </p:bgPr>
+    </p:bg>
+    <p:spTree>
+      <p:nvGrpSpPr>
+        <p:cNvPr id="1" name=""/>
+        <p:cNvGrpSpPr/>
+        <p:nvPr/>
+      </p:nvGrpSpPr>
+      <p:grpSpPr/>
+      <p:sp>
+        <p:nvSpPr>
+          <p:cNvPr id="2" name="TextBox 1"/>
+          <p:cNvSpPr txBox="1"/>
+          <p:nvPr/>
+        </p:nvSpPr>
+        <p:spPr>
+          <a:xfrm>
+            <a:off x="475488" y="274320"/>
+            <a:ext cx="11240719" cy="274320"/>
+          </a:xfrm>
+          <a:prstGeom prst="rect">
+            <a:avLst/>
+          </a:prstGeom>
+          <a:noFill/>
+        </p:spPr>
+        <p:txBody>
+          <a:bodyPr wrap="square" anchor="t" lIns="0" rIns="0" tIns="0" bIns="0">
+            <a:spAutoFit/>
+          </a:bodyPr>
+          <a:lstStyle/>
+          <a:p>
+            <a:pPr>
+              <a:spcAft>
+                <a:spcPts val="0"/>
+              </a:spcAft>
+            </a:pPr>
+            <a:r>
+              <a:rPr sz="1150" b="1">
+                <a:solidFill>
+                  <a:srgbClr val="FF7A3D"/>
+                </a:solidFill>
+                <a:latin typeface="Consolas"/>
+              </a:rPr>
+              <a:t>08   </a:t>
+            </a:r>
+            <a:r>
+              <a:rPr sz="1150" b="0">
+                <a:solidFill>
+                  <a:srgbClr val="B9CDD4"/>
+                </a:solidFill>
+                <a:latin typeface="Consolas"/>
+              </a:rPr>
+              <a:t>REFERENCE · NOT PRESENTED</a:t>
+            </a:r>
+          </a:p>
+        </p:txBody>
+      </p:sp>
+      <p:sp>
+        <p:nvSpPr>
+          <p:cNvPr id="3" name="Rectangle 2"/>
+          <p:cNvSpPr/>
+          <p:nvPr/>
+        </p:nvSpPr>
+        <p:spPr>
+          <a:xfrm>
+            <a:off x="475488" y="603504"/>
+            <a:ext cx="11240719" cy="10972"/>
+          </a:xfrm>
+          <a:prstGeom prst="rect">
+            <a:avLst/>
+          </a:prstGeom>
+          <a:solidFill>
+            <a:srgbClr val="24404A"/>
+          </a:solidFill>
+          <a:ln>
+            <a:noFill/>
+          </a:ln>
+          <a:effectLst/>
+        </p:spPr>
+        <p:style>
+          <a:lnRef idx="1">
+            <a:schemeClr val="accent1"/>
+          </a:lnRef>
+          <a:fillRef idx="3">
+            <a:schemeClr val="accent1"/>
+          </a:fillRef>
+          <a:effectRef idx="2">
+            <a:schemeClr val="accent1"/>
+          </a:effectRef>
+          <a:fontRef idx="minor">
+            <a:schemeClr val="lt1"/>
+          </a:fontRef>
+        </p:style>
+        <p:txBody>
+          <a:bodyPr rtlCol="0" anchor="ctr"/>
+          <a:lstStyle/>
+          <a:p>
+            <a:pPr algn="ctr"/>
+          </a:p>
+        </p:txBody>
+      </p:sp>
+      <p:sp>
+        <p:nvSpPr>
+          <p:cNvPr id="4" name="TextBox 3"/>
+          <p:cNvSpPr txBox="1"/>
+          <p:nvPr/>
+        </p:nvSpPr>
+        <p:spPr>
+          <a:xfrm>
+            <a:off x="475488" y="777240"/>
+            <a:ext cx="11240719" cy="822960"/>
+          </a:xfrm>
+          <a:prstGeom prst="rect">
+            <a:avLst/>
+          </a:prstGeom>
+          <a:noFill/>
+        </p:spPr>
+        <p:txBody>
+          <a:bodyPr wrap="square" anchor="t" lIns="0" rIns="0" tIns="0" bIns="0">
+            <a:spAutoFit/>
+          </a:bodyPr>
+          <a:lstStyle/>
+          <a:p>
+            <a:pPr algn="l">
+              <a:lnSpc>
+                <a:spcPct val="92000"/>
+              </a:lnSpc>
+              <a:spcAft>
+                <a:spcPts val="0"/>
+              </a:spcAft>
+            </a:pPr>
+            <a:r>
+              <a:rPr sz="2700" b="1">
+                <a:solidFill>
+                  <a:srgbClr val="EAF2F2"/>
+                </a:solidFill>
+                <a:latin typeface="Segoe UI"/>
+              </a:rPr>
+              <a:t>Abbreviations and data sources</a:t>
+            </a:r>
+          </a:p>
+        </p:txBody>
+      </p:sp>
+      <p:sp>
+        <p:nvSpPr>
+          <p:cNvPr id="5" name="TextBox 4"/>
+          <p:cNvSpPr txBox="1"/>
+          <p:nvPr/>
+        </p:nvSpPr>
+        <p:spPr>
+          <a:xfrm>
+            <a:off x="475488" y="1572768"/>
+            <a:ext cx="5486400" cy="4846320"/>
+          </a:xfrm>
+          <a:prstGeom prst="rect">
+            <a:avLst/>
+          </a:prstGeom>
+          <a:noFill/>
+        </p:spPr>
+        <p:txBody>
+          <a:bodyPr wrap="square" anchor="t" lIns="0" rIns="0" tIns="0" bIns="0">
+            <a:spAutoFit/>
+          </a:bodyPr>
+          <a:lstStyle/>
+          <a:p>
+            <a:pPr algn="l">
+              <a:spcAft>
+                <a:spcPts val="900"/>
+              </a:spcAft>
+            </a:pPr>
+            <a:r>
+              <a:rPr sz="950" b="0">
+                <a:solidFill>
+                  <a:srgbClr val="8098A1"/>
+                </a:solidFill>
+                <a:latin typeface="Consolas"/>
+              </a:rPr>
+              <a:t>ABBREVIATIONS</a:t>
+            </a:r>
+          </a:p>
+          <a:p>
+            <a:pPr>
+              <a:spcAft>
+                <a:spcPts val="600"/>
+              </a:spcAft>
+            </a:pPr>
+            <a:r>
+              <a:rPr sz="1250" b="1">
+                <a:solidFill>
+                  <a:srgbClr val="FF7A3D"/>
+                </a:solidFill>
+                <a:latin typeface="Consolas"/>
+              </a:rPr>
+              <a:t>MST       </a:t>
+            </a:r>
+            <a:r>
+              <a:rPr sz="1250" b="0">
+                <a:solidFill>
+                  <a:srgbClr val="B9CDD4"/>
+                </a:solidFill>
+                <a:latin typeface="Consolas"/>
+              </a:rPr>
+              <a:t>Minimum Spanning Tree</a:t>
+            </a:r>
+          </a:p>
+          <a:p>
+            <a:pPr>
+              <a:spcAft>
+                <a:spcPts val="600"/>
+              </a:spcAft>
+            </a:pPr>
+            <a:r>
+              <a:rPr sz="1250" b="1">
+                <a:solidFill>
+                  <a:srgbClr val="FF7A3D"/>
+                </a:solidFill>
+                <a:latin typeface="Consolas"/>
+              </a:rPr>
+              <a:t>ESMT      </a:t>
+            </a:r>
+            <a:r>
+              <a:rPr sz="1250" b="0">
+                <a:solidFill>
+                  <a:srgbClr val="B9CDD4"/>
+                </a:solidFill>
+                <a:latin typeface="Consolas"/>
+              </a:rPr>
+              <a:t>Euclidean Steiner Minimal Tree</a:t>
+            </a:r>
+          </a:p>
+          <a:p>
+            <a:pPr>
+              <a:spcAft>
+                <a:spcPts val="600"/>
+              </a:spcAft>
+            </a:pPr>
+            <a:r>
+              <a:rPr sz="1250" b="1">
+                <a:solidFill>
+                  <a:srgbClr val="FF7A3D"/>
+                </a:solidFill>
+                <a:latin typeface="Consolas"/>
+              </a:rPr>
+              <a:t>RSMT      </a:t>
+            </a:r>
+            <a:r>
+              <a:rPr sz="1250" b="0">
+                <a:solidFill>
+                  <a:srgbClr val="B9CDD4"/>
+                </a:solidFill>
+                <a:latin typeface="Consolas"/>
+              </a:rPr>
+              <a:t>Rectilinear Steiner Minimal Tree</a:t>
+            </a:r>
+          </a:p>
+          <a:p>
+            <a:pPr>
+              <a:spcAft>
+                <a:spcPts val="600"/>
+              </a:spcAft>
+            </a:pPr>
+            <a:r>
+              <a:rPr sz="1250" b="1">
+                <a:solidFill>
+                  <a:srgbClr val="FF7A3D"/>
+                </a:solidFill>
+                <a:latin typeface="Consolas"/>
+              </a:rPr>
+              <a:t>TAC       </a:t>
+            </a:r>
+            <a:r>
+              <a:rPr sz="1250" b="0">
+                <a:solidFill>
+                  <a:srgbClr val="B9CDD4"/>
+                </a:solidFill>
+                <a:latin typeface="Consolas"/>
+              </a:rPr>
+              <a:t>Total Annual Cost</a:t>
+            </a:r>
+          </a:p>
+          <a:p>
+            <a:pPr>
+              <a:spcAft>
+                <a:spcPts val="600"/>
+              </a:spcAft>
+            </a:pPr>
+            <a:r>
+              <a:rPr sz="1250" b="1">
+                <a:solidFill>
+                  <a:srgbClr val="FF7A3D"/>
+                </a:solidFill>
+                <a:latin typeface="Consolas"/>
+              </a:rPr>
+              <a:t>EUD       </a:t>
+            </a:r>
+            <a:r>
+              <a:rPr sz="1250" b="0">
+                <a:solidFill>
+                  <a:srgbClr val="B9CDD4"/>
+                </a:solidFill>
+                <a:latin typeface="Consolas"/>
+              </a:rPr>
+              <a:t>Expected Unserved Demand</a:t>
+            </a:r>
+          </a:p>
+          <a:p>
+            <a:pPr>
+              <a:spcAft>
+                <a:spcPts val="600"/>
+              </a:spcAft>
+            </a:pPr>
+            <a:r>
+              <a:rPr sz="1250" b="1">
+                <a:solidFill>
+                  <a:srgbClr val="FF7A3D"/>
+                </a:solidFill>
+                <a:latin typeface="Consolas"/>
+              </a:rPr>
+              <a:t>N-1       </a:t>
+            </a:r>
+            <a:r>
+              <a:rPr sz="1250" b="0">
+                <a:solidFill>
+                  <a:srgbClr val="B9CDD4"/>
+                </a:solidFill>
+                <a:latin typeface="Consolas"/>
+              </a:rPr>
+              <a:t>loss of any one component (single contingency)</a:t>
+            </a:r>
+          </a:p>
+          <a:p>
+            <a:pPr>
+              <a:spcAft>
+                <a:spcPts val="600"/>
+              </a:spcAft>
+            </a:pPr>
+            <a:r>
+              <a:rPr sz="1250" b="1">
+                <a:solidFill>
+                  <a:srgbClr val="FF7A3D"/>
+                </a:solidFill>
+                <a:latin typeface="Consolas"/>
+              </a:rPr>
+              <a:t>DN        </a:t>
+            </a:r>
+            <a:r>
+              <a:rPr sz="1250" b="0">
+                <a:solidFill>
+                  <a:srgbClr val="B9CDD4"/>
+                </a:solidFill>
+                <a:latin typeface="Consolas"/>
+              </a:rPr>
+              <a:t>Diameter Nominal - standard pipe size</a:t>
+            </a:r>
+          </a:p>
+          <a:p>
+            <a:pPr>
+              <a:spcAft>
+                <a:spcPts val="600"/>
+              </a:spcAft>
+            </a:pPr>
+            <a:r>
+              <a:rPr sz="1250" b="1">
+                <a:solidFill>
+                  <a:srgbClr val="FF7A3D"/>
+                </a:solidFill>
+                <a:latin typeface="Consolas"/>
+              </a:rPr>
+              <a:t>PN16      </a:t>
+            </a:r>
+            <a:r>
+              <a:rPr sz="1250" b="0">
+                <a:solidFill>
+                  <a:srgbClr val="B9CDD4"/>
+                </a:solidFill>
+                <a:latin typeface="Consolas"/>
+              </a:rPr>
+              <a:t>Pressure Nominal - pipe rated to 16 bar</a:t>
+            </a:r>
+          </a:p>
+          <a:p>
+            <a:pPr>
+              <a:spcAft>
+                <a:spcPts val="600"/>
+              </a:spcAft>
+            </a:pPr>
+            <a:r>
+              <a:rPr sz="1250" b="1">
+                <a:solidFill>
+                  <a:srgbClr val="FF7A3D"/>
+                </a:solidFill>
+                <a:latin typeface="Consolas"/>
+              </a:rPr>
+              <a:t>DEM       </a:t>
+            </a:r>
+            <a:r>
+              <a:rPr sz="1250" b="0">
+                <a:solidFill>
+                  <a:srgbClr val="B9CDD4"/>
+                </a:solidFill>
+                <a:latin typeface="Consolas"/>
+              </a:rPr>
+              <a:t>Digital Elevation Model</a:t>
+            </a:r>
+          </a:p>
+          <a:p>
+            <a:pPr>
+              <a:spcAft>
+                <a:spcPts val="600"/>
+              </a:spcAft>
+            </a:pPr>
+            <a:r>
+              <a:rPr sz="1250" b="1">
+                <a:solidFill>
+                  <a:srgbClr val="FF7A3D"/>
+                </a:solidFill>
+                <a:latin typeface="Consolas"/>
+              </a:rPr>
+              <a:t>SRTM      </a:t>
+            </a:r>
+            <a:r>
+              <a:rPr sz="1250" b="0">
+                <a:solidFill>
+                  <a:srgbClr val="B9CDD4"/>
+                </a:solidFill>
+                <a:latin typeface="Consolas"/>
+              </a:rPr>
+              <a:t>Shuttle Radar Topography Mission (NASA)</a:t>
+            </a:r>
+          </a:p>
+          <a:p>
+            <a:pPr>
+              <a:spcAft>
+                <a:spcPts val="600"/>
+              </a:spcAft>
+            </a:pPr>
+            <a:r>
+              <a:rPr sz="1250" b="1">
+                <a:solidFill>
+                  <a:srgbClr val="FF7A3D"/>
+                </a:solidFill>
+                <a:latin typeface="Consolas"/>
+              </a:rPr>
+              <a:t>LP        </a:t>
+            </a:r>
+            <a:r>
+              <a:rPr sz="1250" b="0">
+                <a:solidFill>
+                  <a:srgbClr val="B9CDD4"/>
+                </a:solidFill>
+                <a:latin typeface="Consolas"/>
+              </a:rPr>
+              <a:t>Linear Programming</a:t>
+            </a:r>
+          </a:p>
+          <a:p>
+            <a:pPr>
+              <a:spcAft>
+                <a:spcPts val="600"/>
+              </a:spcAft>
+            </a:pPr>
+            <a:r>
+              <a:rPr sz="1250" b="1">
+                <a:solidFill>
+                  <a:srgbClr val="FF7A3D"/>
+                </a:solidFill>
+                <a:latin typeface="Consolas"/>
+              </a:rPr>
+              <a:t>lambda_2  </a:t>
+            </a:r>
+            <a:r>
+              <a:rPr sz="1250" b="0">
+                <a:solidFill>
+                  <a:srgbClr val="B9CDD4"/>
+                </a:solidFill>
+                <a:latin typeface="Consolas"/>
+              </a:rPr>
+              <a:t>algebraic connectivity (Fiedler value)</a:t>
+            </a:r>
+          </a:p>
+        </p:txBody>
+      </p:sp>
+      <p:sp>
+        <p:nvSpPr>
+          <p:cNvPr id="6" name="TextBox 5"/>
+          <p:cNvSpPr txBox="1"/>
+          <p:nvPr/>
+        </p:nvSpPr>
+        <p:spPr>
+          <a:xfrm>
+            <a:off x="6327648" y="1572768"/>
+            <a:ext cx="5388559" cy="4846320"/>
+          </a:xfrm>
+          <a:prstGeom prst="rect">
+            <a:avLst/>
+          </a:prstGeom>
+          <a:noFill/>
+        </p:spPr>
+        <p:txBody>
+          <a:bodyPr wrap="square" anchor="t" lIns="0" rIns="0" tIns="0" bIns="0">
+            <a:spAutoFit/>
+          </a:bodyPr>
+          <a:lstStyle/>
+          <a:p>
+            <a:pPr algn="l">
+              <a:spcAft>
+                <a:spcPts val="900"/>
+              </a:spcAft>
+            </a:pPr>
+            <a:r>
+              <a:rPr sz="950" b="0">
+                <a:solidFill>
+                  <a:srgbClr val="8098A1"/>
+                </a:solidFill>
+                <a:latin typeface="Consolas"/>
+              </a:rPr>
+              <a:t>DATA AND SOURCES - ALL REAL, ALL CITED</a:t>
+            </a:r>
+          </a:p>
+          <a:p>
+            <a:pPr algn="l">
+              <a:spcAft>
+                <a:spcPts val="200"/>
+              </a:spcAft>
+            </a:pPr>
+            <a:r>
+              <a:rPr sz="1250" b="1">
+                <a:solidFill>
+                  <a:srgbClr val="5AD2A8"/>
+                </a:solidFill>
+                <a:latin typeface="Segoe UI"/>
+              </a:rPr>
+              <a:t>AixDHN</a:t>
+            </a:r>
+          </a:p>
+          <a:p>
+            <a:pPr algn="l">
+              <a:lnSpc>
+                <a:spcPct val="96000"/>
+              </a:lnSpc>
+              <a:spcAft>
+                <a:spcPts val="800"/>
+              </a:spcAft>
+            </a:pPr>
+            <a:r>
+              <a:rPr sz="1150" b="0">
+                <a:solidFill>
+                  <a:srgbClr val="B9CDD4"/>
+                </a:solidFill>
+                <a:latin typeface="Segoe UI"/>
+              </a:rPr>
+              <a:t>RWTH Aachen EBC, MIT licence - real German district heating areas, demand and census cells</a:t>
+            </a:r>
+          </a:p>
+          <a:p>
+            <a:pPr algn="l">
+              <a:spcAft>
+                <a:spcPts val="200"/>
+              </a:spcAft>
+            </a:pPr>
+            <a:r>
+              <a:rPr sz="1250" b="1">
+                <a:solidFill>
+                  <a:srgbClr val="5AD2A8"/>
+                </a:solidFill>
+                <a:latin typeface="Segoe UI"/>
+              </a:rPr>
+              <a:t>NASA SRTM 30 m</a:t>
+            </a:r>
+          </a:p>
+          <a:p>
+            <a:pPr algn="l">
+              <a:lnSpc>
+                <a:spcPct val="96000"/>
+              </a:lnSpc>
+              <a:spcAft>
+                <a:spcPts val="800"/>
+              </a:spcAft>
+            </a:pPr>
+            <a:r>
+              <a:rPr sz="1150" b="0">
+                <a:solidFill>
+                  <a:srgbClr val="B9CDD4"/>
+                </a:solidFill>
+                <a:latin typeface="Segoe UI"/>
+              </a:rPr>
+              <a:t>elevation, via the OpenTopoData API</a:t>
+            </a:r>
+          </a:p>
+          <a:p>
+            <a:pPr algn="l">
+              <a:spcAft>
+                <a:spcPts val="200"/>
+              </a:spcAft>
+            </a:pPr>
+            <a:r>
+              <a:rPr sz="1250" b="1">
+                <a:solidFill>
+                  <a:srgbClr val="5AD2A8"/>
+                </a:solidFill>
+                <a:latin typeface="Segoe UI"/>
+              </a:rPr>
+              <a:t>EN 253</a:t>
+            </a:r>
+          </a:p>
+          <a:p>
+            <a:pPr algn="l">
+              <a:lnSpc>
+                <a:spcPct val="96000"/>
+              </a:lnSpc>
+              <a:spcAft>
+                <a:spcPts val="800"/>
+              </a:spcAft>
+            </a:pPr>
+            <a:r>
+              <a:rPr sz="1150" b="0">
+                <a:solidFill>
+                  <a:srgbClr val="B9CDD4"/>
+                </a:solidFill>
+                <a:latin typeface="Segoe UI"/>
+              </a:rPr>
+              <a:t>European standard for pre-insulated bonded pipe - the diameter catalogue</a:t>
+            </a:r>
+          </a:p>
+          <a:p>
+            <a:pPr algn="l">
+              <a:spcAft>
+                <a:spcPts val="200"/>
+              </a:spcAft>
+            </a:pPr>
+            <a:r>
+              <a:rPr sz="1250" b="1">
+                <a:solidFill>
+                  <a:srgbClr val="5AD2A8"/>
+                </a:solidFill>
+                <a:latin typeface="Segoe UI"/>
+              </a:rPr>
+              <a:t>Persson &amp; Werner 2011</a:t>
+            </a:r>
+          </a:p>
+          <a:p>
+            <a:pPr algn="l">
+              <a:lnSpc>
+                <a:spcPct val="96000"/>
+              </a:lnSpc>
+              <a:spcAft>
+                <a:spcPts val="800"/>
+              </a:spcAft>
+            </a:pPr>
+            <a:r>
+              <a:rPr sz="1150" b="0">
+                <a:solidFill>
+                  <a:srgbClr val="B9CDD4"/>
+                </a:solidFill>
+                <a:latin typeface="Segoe UI"/>
+              </a:rPr>
+              <a:t>district-heating trench cost function</a:t>
+            </a:r>
+          </a:p>
+          <a:p>
+            <a:pPr algn="l">
+              <a:spcAft>
+                <a:spcPts val="200"/>
+              </a:spcAft>
+            </a:pPr>
+            <a:r>
+              <a:rPr sz="1250" b="1">
+                <a:solidFill>
+                  <a:srgbClr val="5AD2A8"/>
+                </a:solidFill>
+                <a:latin typeface="Segoe UI"/>
+              </a:rPr>
+              <a:t>Valincius et al. 2015</a:t>
+            </a:r>
+          </a:p>
+          <a:p>
+            <a:pPr algn="l">
+              <a:lnSpc>
+                <a:spcPct val="96000"/>
+              </a:lnSpc>
+              <a:spcAft>
+                <a:spcPts val="800"/>
+              </a:spcAft>
+            </a:pPr>
+            <a:r>
+              <a:rPr sz="1150" b="0">
+                <a:solidFill>
+                  <a:srgbClr val="B9CDD4"/>
+                </a:solidFill>
+                <a:latin typeface="Segoe UI"/>
+              </a:rPr>
+              <a:t>pipe failure rates, 0.02-0.31 per km-year</a:t>
+            </a:r>
+          </a:p>
+          <a:p>
+            <a:pPr algn="l">
+              <a:spcAft>
+                <a:spcPts val="200"/>
+              </a:spcAft>
+            </a:pPr>
+            <a:r>
+              <a:rPr sz="1250" b="1">
+                <a:solidFill>
+                  <a:srgbClr val="5AD2A8"/>
+                </a:solidFill>
+                <a:latin typeface="Segoe UI"/>
+              </a:rPr>
+              <a:t>Eurostat H2 2025</a:t>
+            </a:r>
+          </a:p>
+          <a:p>
+            <a:pPr algn="l">
+              <a:lnSpc>
+                <a:spcPct val="96000"/>
+              </a:lnSpc>
+              <a:spcAft>
+                <a:spcPts val="800"/>
+              </a:spcAft>
+            </a:pPr>
+            <a:r>
+              <a:rPr sz="1150" b="0">
+                <a:solidFill>
+                  <a:srgbClr val="B9CDD4"/>
+                </a:solidFill>
+                <a:latin typeface="Segoe UI"/>
+              </a:rPr>
+              <a:t>German industrial electricity, 0.1922 EUR/kWh</a:t>
+            </a:r>
+          </a:p>
+          <a:p>
+            <a:pPr algn="l">
+              <a:spcAft>
+                <a:spcPts val="200"/>
+              </a:spcAft>
+            </a:pPr>
+            <a:r>
+              <a:rPr sz="1250" b="1">
+                <a:solidFill>
+                  <a:srgbClr val="5AD2A8"/>
+                </a:solidFill>
+                <a:latin typeface="Segoe UI"/>
+              </a:rPr>
+              <a:t>Gao et al. 2020</a:t>
+            </a:r>
+          </a:p>
+          <a:p>
+            <a:pPr algn="l">
+              <a:lnSpc>
+                <a:spcPct val="96000"/>
+              </a:lnSpc>
+              <a:spcAft>
+                <a:spcPts val="800"/>
+              </a:spcAft>
+            </a:pPr>
+            <a:r>
+              <a:rPr sz="1150" b="0">
+                <a:solidFill>
+                  <a:srgbClr val="B9CDD4"/>
+                </a:solidFill>
+                <a:latin typeface="Segoe UI"/>
+              </a:rPr>
+              <a:t>the reproduced paper, Chem. Eng. Trans. 81</a:t>
             </a:r>
           </a:p>
         </p:txBody>
